--- a/SIM-Tema-4/Actividad 4.3 Banco de Ejercicios_CynthiaMorales_SIM_7ISCM.pptx
+++ b/SIM-Tema-4/Actividad 4.3 Banco de Ejercicios_CynthiaMorales_SIM_7ISCM.pptx
@@ -5,7 +5,7 @@
     <p:sldMasterId id="2147483648" r:id="rId1"/>
   </p:sldMasterIdLst>
   <p:notesMasterIdLst>
-    <p:notesMasterId r:id="rId25"/>
+    <p:notesMasterId r:id="rId26"/>
   </p:notesMasterIdLst>
   <p:sldIdLst>
     <p:sldId id="278" r:id="rId2"/>
@@ -31,6 +31,7 @@
     <p:sldId id="275" r:id="rId22"/>
     <p:sldId id="276" r:id="rId23"/>
     <p:sldId id="277" r:id="rId24"/>
+    <p:sldId id="279" r:id="rId25"/>
   </p:sldIdLst>
   <p:sldSz cx="12192000" cy="6858000"/>
   <p:notesSz cx="6858000" cy="12192000"/>
@@ -2375,7 +2376,7 @@
           </a:prstGeom>
           <a:extLst>
             <a:ext uri="{C572A759-6A51-4108-AA02-DFA0A04FC94B}">
-              <ma14:wrappingTextBoxFlag xmlns:ma14="http://schemas.microsoft.com/office/mac/drawingml/2011/main" xmlns="" val="0"/>
+              <ma14:wrappingTextBoxFlag xmlns="" xmlns:ma14="http://schemas.microsoft.com/office/mac/drawingml/2011/main" val="0"/>
             </a:ext>
           </a:extLst>
         </p:spPr>
@@ -2453,7 +2454,7 @@
           </a:prstGeom>
           <a:extLst>
             <a:ext uri="{C572A759-6A51-4108-AA02-DFA0A04FC94B}">
-              <ma14:wrappingTextBoxFlag xmlns:ma14="http://schemas.microsoft.com/office/mac/drawingml/2011/main" xmlns="" val="0"/>
+              <ma14:wrappingTextBoxFlag xmlns="" xmlns:ma14="http://schemas.microsoft.com/office/mac/drawingml/2011/main" val="0"/>
             </a:ext>
           </a:extLst>
         </p:spPr>
@@ -3454,7 +3455,7 @@
                 <a:cs typeface="Glacial Indifference"/>
                 <a:sym typeface="Glacial Indifference"/>
               </a:rPr>
-              <a:t> Frontera Comalapa, Chiapas. A 10 de </a:t>
+              <a:t> Frontera Comalapa, Chiapas. A 02 de </a:t>
             </a:r>
             <a:r>
               <a:rPr lang="en-US" sz="1600" dirty="0" err="1">
@@ -4075,7 +4076,7 @@
           </a:prstGeom>
           <a:extLst>
             <a:ext uri="{C572A759-6A51-4108-AA02-DFA0A04FC94B}">
-              <ma14:wrappingTextBoxFlag xmlns:ma14="http://schemas.microsoft.com/office/mac/drawingml/2011/main" xmlns="" val="0"/>
+              <ma14:wrappingTextBoxFlag xmlns="" xmlns:ma14="http://schemas.microsoft.com/office/mac/drawingml/2011/main" val="0"/>
             </a:ext>
           </a:extLst>
         </p:spPr>
@@ -4793,7 +4794,7 @@
           </a:prstGeom>
           <a:extLst>
             <a:ext uri="{C572A759-6A51-4108-AA02-DFA0A04FC94B}">
-              <ma14:wrappingTextBoxFlag xmlns:ma14="http://schemas.microsoft.com/office/mac/drawingml/2011/main" xmlns="" val="0"/>
+              <ma14:wrappingTextBoxFlag xmlns="" xmlns:ma14="http://schemas.microsoft.com/office/mac/drawingml/2011/main" val="0"/>
             </a:ext>
           </a:extLst>
         </p:spPr>
@@ -5248,7 +5249,7 @@
           </a:prstGeom>
           <a:extLst>
             <a:ext uri="{C572A759-6A51-4108-AA02-DFA0A04FC94B}">
-              <ma14:wrappingTextBoxFlag xmlns:ma14="http://schemas.microsoft.com/office/mac/drawingml/2011/main" xmlns="" val="0"/>
+              <ma14:wrappingTextBoxFlag xmlns="" xmlns:ma14="http://schemas.microsoft.com/office/mac/drawingml/2011/main" val="0"/>
             </a:ext>
           </a:extLst>
         </p:spPr>
@@ -5703,7 +5704,7 @@
           </a:prstGeom>
           <a:extLst>
             <a:ext uri="{C572A759-6A51-4108-AA02-DFA0A04FC94B}">
-              <ma14:wrappingTextBoxFlag xmlns:ma14="http://schemas.microsoft.com/office/mac/drawingml/2011/main" xmlns="" val="0"/>
+              <ma14:wrappingTextBoxFlag xmlns="" xmlns:ma14="http://schemas.microsoft.com/office/mac/drawingml/2011/main" val="0"/>
             </a:ext>
           </a:extLst>
         </p:spPr>
@@ -6158,7 +6159,7 @@
           </a:prstGeom>
           <a:extLst>
             <a:ext uri="{C572A759-6A51-4108-AA02-DFA0A04FC94B}">
-              <ma14:wrappingTextBoxFlag xmlns:ma14="http://schemas.microsoft.com/office/mac/drawingml/2011/main" xmlns="" val="0"/>
+              <ma14:wrappingTextBoxFlag xmlns="" xmlns:ma14="http://schemas.microsoft.com/office/mac/drawingml/2011/main" val="0"/>
             </a:ext>
           </a:extLst>
         </p:spPr>
@@ -6895,7 +6896,7 @@
           </a:prstGeom>
           <a:extLst>
             <a:ext uri="{C572A759-6A51-4108-AA02-DFA0A04FC94B}">
-              <ma14:wrappingTextBoxFlag xmlns:ma14="http://schemas.microsoft.com/office/mac/drawingml/2011/main" xmlns="" val="0"/>
+              <ma14:wrappingTextBoxFlag xmlns="" xmlns:ma14="http://schemas.microsoft.com/office/mac/drawingml/2011/main" val="0"/>
             </a:ext>
           </a:extLst>
         </p:spPr>
@@ -7350,7 +7351,7 @@
           </a:prstGeom>
           <a:extLst>
             <a:ext uri="{C572A759-6A51-4108-AA02-DFA0A04FC94B}">
-              <ma14:wrappingTextBoxFlag xmlns:ma14="http://schemas.microsoft.com/office/mac/drawingml/2011/main" xmlns="" val="0"/>
+              <ma14:wrappingTextBoxFlag xmlns="" xmlns:ma14="http://schemas.microsoft.com/office/mac/drawingml/2011/main" val="0"/>
             </a:ext>
           </a:extLst>
         </p:spPr>
@@ -7805,7 +7806,7 @@
           </a:prstGeom>
           <a:extLst>
             <a:ext uri="{C572A759-6A51-4108-AA02-DFA0A04FC94B}">
-              <ma14:wrappingTextBoxFlag xmlns:ma14="http://schemas.microsoft.com/office/mac/drawingml/2011/main" xmlns="" val="0"/>
+              <ma14:wrappingTextBoxFlag xmlns="" xmlns:ma14="http://schemas.microsoft.com/office/mac/drawingml/2011/main" val="0"/>
             </a:ext>
           </a:extLst>
         </p:spPr>
@@ -8494,7 +8495,7 @@
           </a:prstGeom>
           <a:extLst>
             <a:ext uri="{C572A759-6A51-4108-AA02-DFA0A04FC94B}">
-              <ma14:wrappingTextBoxFlag xmlns:ma14="http://schemas.microsoft.com/office/mac/drawingml/2011/main" xmlns="" val="0"/>
+              <ma14:wrappingTextBoxFlag xmlns="" xmlns:ma14="http://schemas.microsoft.com/office/mac/drawingml/2011/main" val="0"/>
             </a:ext>
           </a:extLst>
         </p:spPr>
@@ -8949,7 +8950,7 @@
           </a:prstGeom>
           <a:extLst>
             <a:ext uri="{C572A759-6A51-4108-AA02-DFA0A04FC94B}">
-              <ma14:wrappingTextBoxFlag xmlns:ma14="http://schemas.microsoft.com/office/mac/drawingml/2011/main" xmlns="" val="0"/>
+              <ma14:wrappingTextBoxFlag xmlns="" xmlns:ma14="http://schemas.microsoft.com/office/mac/drawingml/2011/main" val="0"/>
             </a:ext>
           </a:extLst>
         </p:spPr>
@@ -10737,7 +10738,7 @@
           </a:prstGeom>
           <a:extLst>
             <a:ext uri="{C572A759-6A51-4108-AA02-DFA0A04FC94B}">
-              <ma14:wrappingTextBoxFlag xmlns:ma14="http://schemas.microsoft.com/office/mac/drawingml/2011/main" xmlns="" val="0"/>
+              <ma14:wrappingTextBoxFlag xmlns="" xmlns:ma14="http://schemas.microsoft.com/office/mac/drawingml/2011/main" val="0"/>
             </a:ext>
           </a:extLst>
         </p:spPr>
@@ -11211,6 +11212,142 @@
 </p:sld>
 </file>
 
+<file path=ppt/slides/slide24.xml><?xml version="1.0" encoding="utf-8"?>
+<p:sld xmlns:a="http://schemas.openxmlformats.org/drawingml/2006/main" xmlns:r="http://schemas.openxmlformats.org/officeDocument/2006/relationships" xmlns:p="http://schemas.openxmlformats.org/presentationml/2006/main">
+  <p:cSld>
+    <p:spTree>
+      <p:nvGrpSpPr>
+        <p:cNvPr id="1" name=""/>
+        <p:cNvGrpSpPr/>
+        <p:nvPr/>
+      </p:nvGrpSpPr>
+      <p:grpSpPr>
+        <a:xfrm>
+          <a:off x="0" y="0"/>
+          <a:ext cx="0" cy="0"/>
+          <a:chOff x="0" y="0"/>
+          <a:chExt cx="0" cy="0"/>
+        </a:xfrm>
+      </p:grpSpPr>
+      <p:sp>
+        <p:nvSpPr>
+          <p:cNvPr id="2" name="Título 1">
+            <a:extLst>
+              <a:ext uri="{FF2B5EF4-FFF2-40B4-BE49-F238E27FC236}">
+                <a16:creationId xmlns:a16="http://schemas.microsoft.com/office/drawing/2014/main" id="{AA153AAC-5497-1DC1-90B7-8431088C18A2}"/>
+              </a:ext>
+            </a:extLst>
+          </p:cNvPr>
+          <p:cNvSpPr>
+            <a:spLocks noGrp="1"/>
+          </p:cNvSpPr>
+          <p:nvPr>
+            <p:ph type="title" idx="100"/>
+          </p:nvPr>
+        </p:nvSpPr>
+        <p:spPr/>
+        <p:txBody>
+          <a:bodyPr/>
+          <a:lstStyle/>
+          <a:p>
+            <a:r>
+              <a:rPr lang="es-MX" dirty="0"/>
+              <a:t>ANEXO LINK DE LA ACTIVIDAD SOLICITADA Y ENVIADA POR GITHUB:</a:t>
+            </a:r>
+          </a:p>
+        </p:txBody>
+      </p:sp>
+      <p:sp>
+        <p:nvSpPr>
+          <p:cNvPr id="4" name="CuadroTexto 3">
+            <a:extLst>
+              <a:ext uri="{FF2B5EF4-FFF2-40B4-BE49-F238E27FC236}">
+                <a16:creationId xmlns:a16="http://schemas.microsoft.com/office/drawing/2014/main" id="{6DABCCB8-12E2-8CA2-9C1E-EF96374B931F}"/>
+              </a:ext>
+            </a:extLst>
+          </p:cNvPr>
+          <p:cNvSpPr txBox="1"/>
+          <p:nvPr/>
+        </p:nvSpPr>
+        <p:spPr>
+          <a:xfrm>
+            <a:off x="548640" y="1899920"/>
+            <a:ext cx="8595360" cy="646331"/>
+          </a:xfrm>
+          <a:prstGeom prst="rect">
+            <a:avLst/>
+          </a:prstGeom>
+          <a:noFill/>
+        </p:spPr>
+        <p:txBody>
+          <a:bodyPr wrap="square">
+            <a:spAutoFit/>
+          </a:bodyPr>
+          <a:lstStyle/>
+          <a:p>
+            <a:r>
+              <a:rPr lang="es-MX" dirty="0">
+                <a:solidFill>
+                  <a:schemeClr val="bg1"/>
+                </a:solidFill>
+              </a:rPr>
+              <a:t>https://github.com/Cynthia21Morales/SIMULACION_CynthiaJasmineMT/blob/main/SIM-Tema-4/Actividad%204.3%20Banco%20de%20Ejercicios_CynthiaMorales_SIM_7ISCM.pptx</a:t>
+            </a:r>
+          </a:p>
+        </p:txBody>
+      </p:sp>
+      <p:sp>
+        <p:nvSpPr>
+          <p:cNvPr id="5" name="CuadroTexto 4">
+            <a:extLst>
+              <a:ext uri="{FF2B5EF4-FFF2-40B4-BE49-F238E27FC236}">
+                <a16:creationId xmlns:a16="http://schemas.microsoft.com/office/drawing/2014/main" id="{EC95D317-3767-00F7-759C-BFB715205623}"/>
+              </a:ext>
+            </a:extLst>
+          </p:cNvPr>
+          <p:cNvSpPr txBox="1"/>
+          <p:nvPr/>
+        </p:nvSpPr>
+        <p:spPr>
+          <a:xfrm>
+            <a:off x="548640" y="2885440"/>
+            <a:ext cx="8483600" cy="646331"/>
+          </a:xfrm>
+          <a:prstGeom prst="rect">
+            <a:avLst/>
+          </a:prstGeom>
+          <a:noFill/>
+        </p:spPr>
+        <p:txBody>
+          <a:bodyPr wrap="square" rtlCol="0">
+            <a:spAutoFit/>
+          </a:bodyPr>
+          <a:lstStyle/>
+          <a:p>
+            <a:r>
+              <a:rPr lang="es-MX" dirty="0">
+                <a:solidFill>
+                  <a:schemeClr val="bg1"/>
+                </a:solidFill>
+              </a:rPr>
+              <a:t>NOTA: LOS EJERCICIOS ELABORADOS SE ENCUENTRA ADJUNTADOS EN EL REPOSITORIO DE ESTA ACTIVIDAD</a:t>
+            </a:r>
+          </a:p>
+        </p:txBody>
+      </p:sp>
+    </p:spTree>
+    <p:extLst>
+      <p:ext uri="{BB962C8B-B14F-4D97-AF65-F5344CB8AC3E}">
+        <p14:creationId xmlns:p14="http://schemas.microsoft.com/office/powerpoint/2010/main" val="1450193230"/>
+      </p:ext>
+    </p:extLst>
+  </p:cSld>
+  <p:clrMapOvr>
+    <a:masterClrMapping/>
+  </p:clrMapOvr>
+</p:sld>
+</file>
+
 <file path=ppt/slides/slide3.xml><?xml version="1.0" encoding="utf-8"?>
 <p:sld xmlns:a="http://schemas.openxmlformats.org/drawingml/2006/main" xmlns:r="http://schemas.openxmlformats.org/officeDocument/2006/relationships" xmlns:p="http://schemas.openxmlformats.org/presentationml/2006/main">
   <p:cSld name="Slide 2">
@@ -11757,7 +11894,7 @@
           </a:prstGeom>
           <a:extLst>
             <a:ext uri="{C572A759-6A51-4108-AA02-DFA0A04FC94B}">
-              <ma14:wrappingTextBoxFlag xmlns:ma14="http://schemas.microsoft.com/office/mac/drawingml/2011/main" xmlns="" val="0"/>
+              <ma14:wrappingTextBoxFlag xmlns="" xmlns:ma14="http://schemas.microsoft.com/office/mac/drawingml/2011/main" val="0"/>
             </a:ext>
           </a:extLst>
         </p:spPr>
@@ -12388,7 +12525,7 @@
           </a:prstGeom>
           <a:extLst>
             <a:ext uri="{C572A759-6A51-4108-AA02-DFA0A04FC94B}">
-              <ma14:wrappingTextBoxFlag xmlns:ma14="http://schemas.microsoft.com/office/mac/drawingml/2011/main" xmlns="" val="0"/>
+              <ma14:wrappingTextBoxFlag xmlns="" xmlns:ma14="http://schemas.microsoft.com/office/mac/drawingml/2011/main" val="0"/>
             </a:ext>
           </a:extLst>
         </p:spPr>
@@ -13125,7 +13262,7 @@
           </a:prstGeom>
           <a:extLst>
             <a:ext uri="{C572A759-6A51-4108-AA02-DFA0A04FC94B}">
-              <ma14:wrappingTextBoxFlag xmlns:ma14="http://schemas.microsoft.com/office/mac/drawingml/2011/main" xmlns="" val="0"/>
+              <ma14:wrappingTextBoxFlag xmlns="" xmlns:ma14="http://schemas.microsoft.com/office/mac/drawingml/2011/main" val="0"/>
             </a:ext>
           </a:extLst>
         </p:spPr>
@@ -13580,7 +13717,7 @@
           </a:prstGeom>
           <a:extLst>
             <a:ext uri="{C572A759-6A51-4108-AA02-DFA0A04FC94B}">
-              <ma14:wrappingTextBoxFlag xmlns:ma14="http://schemas.microsoft.com/office/mac/drawingml/2011/main" xmlns="" val="0"/>
+              <ma14:wrappingTextBoxFlag xmlns="" xmlns:ma14="http://schemas.microsoft.com/office/mac/drawingml/2011/main" val="0"/>
             </a:ext>
           </a:extLst>
         </p:spPr>
@@ -14035,7 +14172,7 @@
           </a:prstGeom>
           <a:extLst>
             <a:ext uri="{C572A759-6A51-4108-AA02-DFA0A04FC94B}">
-              <ma14:wrappingTextBoxFlag xmlns:ma14="http://schemas.microsoft.com/office/mac/drawingml/2011/main" xmlns="" val="0"/>
+              <ma14:wrappingTextBoxFlag xmlns="" xmlns:ma14="http://schemas.microsoft.com/office/mac/drawingml/2011/main" val="0"/>
             </a:ext>
           </a:extLst>
         </p:spPr>
@@ -14490,7 +14627,7 @@
           </a:prstGeom>
           <a:extLst>
             <a:ext uri="{C572A759-6A51-4108-AA02-DFA0A04FC94B}">
-              <ma14:wrappingTextBoxFlag xmlns:ma14="http://schemas.microsoft.com/office/mac/drawingml/2011/main" xmlns="" val="0"/>
+              <ma14:wrappingTextBoxFlag xmlns="" xmlns:ma14="http://schemas.microsoft.com/office/mac/drawingml/2011/main" val="0"/>
             </a:ext>
           </a:extLst>
         </p:spPr>
